--- a/tools/converter/deccan_convert/assets_data/deccan-deck.pptx
+++ b/tools/converter/deccan_convert/assets_data/deccan-deck.pptx
@@ -2715,12 +2715,11 @@
           <a:bodyPr vert="horz" lIns="91440" tIns="45720" rIns="91440" bIns="45720" rtlCol="0" anchor="ctr"/>
           <a:lstStyle>
             <a:lvl1pPr algn="l">
-              <a:defRPr sz="1200">
+              <a:defRPr sz="850">
                 <a:solidFill>
-                  <a:schemeClr val="tx1">
-                    <a:tint val="75000"/>
-                  </a:schemeClr>
+                  <a:srgbClr val="78716C"/>
                 </a:solidFill>
+                <a:latin typeface="Cascadia Mono"/>
               </a:defRPr>
             </a:lvl1pPr>
           </a:lstStyle>
@@ -2756,17 +2755,24 @@
           <a:bodyPr vert="horz" lIns="91440" tIns="45720" rIns="91440" bIns="45720" rtlCol="0" anchor="ctr"/>
           <a:lstStyle>
             <a:lvl1pPr algn="ctr">
-              <a:defRPr sz="1200">
+              <a:defRPr sz="850">
                 <a:solidFill>
-                  <a:schemeClr val="tx1">
-                    <a:tint val="75000"/>
-                  </a:schemeClr>
+                  <a:srgbClr val="78716C"/>
                 </a:solidFill>
+                <a:latin typeface="Cascadia Mono"/>
               </a:defRPr>
             </a:lvl1pPr>
           </a:lstStyle>
           <a:p>
-            <a:endParaRPr lang="en-US"/>
+            <a:r>
+              <a:rPr lang="en-US" sz="850">
+                <a:solidFill>
+                  <a:srgbClr val="78716C"/>
+                </a:solidFill>
+                <a:latin typeface="Cascadia Mono"/>
+              </a:rPr>
+              <a:t>Deccan Fine Chemicals · Confidential</a:t>
+            </a:r>
           </a:p>
         </p:txBody>
       </p:sp>
@@ -2793,12 +2799,11 @@
           <a:bodyPr vert="horz" lIns="91440" tIns="45720" rIns="91440" bIns="45720" rtlCol="0" anchor="ctr"/>
           <a:lstStyle>
             <a:lvl1pPr algn="r">
-              <a:defRPr sz="1200">
+              <a:defRPr sz="850">
                 <a:solidFill>
-                  <a:schemeClr val="tx1">
-                    <a:tint val="75000"/>
-                  </a:schemeClr>
+                  <a:srgbClr val="78716C"/>
                 </a:solidFill>
+                <a:latin typeface="Cascadia Mono"/>
               </a:defRPr>
             </a:lvl1pPr>
           </a:lstStyle>
@@ -2854,7 +2859,7 @@
         <a:spcBef>
           <a:spcPct val="20000"/>
         </a:spcBef>
-        <a:buFont typeface="Arial"/>
+        <a:buFont typeface="Segoe UI Variable Text"/>
         <a:buChar char="•"/>
         <a:defRPr sz="3200" kern="1200">
           <a:solidFill>
@@ -2869,7 +2874,7 @@
         <a:spcBef>
           <a:spcPct val="20000"/>
         </a:spcBef>
-        <a:buFont typeface="Arial"/>
+        <a:buFont typeface="Segoe UI Variable Text"/>
         <a:buChar char="–"/>
         <a:defRPr sz="2800" kern="1200">
           <a:solidFill>
@@ -2884,7 +2889,7 @@
         <a:spcBef>
           <a:spcPct val="20000"/>
         </a:spcBef>
-        <a:buFont typeface="Arial"/>
+        <a:buFont typeface="Segoe UI Variable Text"/>
         <a:buChar char="•"/>
         <a:defRPr sz="2400" kern="1200">
           <a:solidFill>
@@ -2899,7 +2904,7 @@
         <a:spcBef>
           <a:spcPct val="20000"/>
         </a:spcBef>
-        <a:buFont typeface="Arial"/>
+        <a:buFont typeface="Segoe UI Variable Text"/>
         <a:buChar char="–"/>
         <a:defRPr sz="2000" kern="1200">
           <a:solidFill>
@@ -2914,7 +2919,7 @@
         <a:spcBef>
           <a:spcPct val="20000"/>
         </a:spcBef>
-        <a:buFont typeface="Arial"/>
+        <a:buFont typeface="Segoe UI Variable Text"/>
         <a:buChar char="»"/>
         <a:defRPr sz="2000" kern="1200">
           <a:solidFill>
@@ -2929,7 +2934,7 @@
         <a:spcBef>
           <a:spcPct val="20000"/>
         </a:spcBef>
-        <a:buFont typeface="Arial"/>
+        <a:buFont typeface="Segoe UI Variable Text"/>
         <a:buChar char="•"/>
         <a:defRPr sz="2000" kern="1200">
           <a:solidFill>
@@ -2944,7 +2949,7 @@
         <a:spcBef>
           <a:spcPct val="20000"/>
         </a:spcBef>
-        <a:buFont typeface="Arial"/>
+        <a:buFont typeface="Segoe UI Variable Text"/>
         <a:buChar char="•"/>
         <a:defRPr sz="2000" kern="1200">
           <a:solidFill>
@@ -2959,7 +2964,7 @@
         <a:spcBef>
           <a:spcPct val="20000"/>
         </a:spcBef>
-        <a:buFont typeface="Arial"/>
+        <a:buFont typeface="Segoe UI Variable Text"/>
         <a:buChar char="•"/>
         <a:defRPr sz="2000" kern="1200">
           <a:solidFill>
@@ -2974,7 +2979,7 @@
         <a:spcBef>
           <a:spcPct val="20000"/>
         </a:spcBef>
-        <a:buFont typeface="Arial"/>
+        <a:buFont typeface="Segoe UI Variable Text"/>
         <a:buChar char="•"/>
         <a:defRPr sz="2000" kern="1200">
           <a:solidFill>
@@ -4443,114 +4448,54 @@
 <file path=ppt/theme/theme1.xml><?xml version="1.0" encoding="utf-8"?>
 <a:theme xmlns:a="http://schemas.openxmlformats.org/drawingml/2006/main" name="Office Theme">
   <a:themeElements>
-    <a:clrScheme name="Office">
+    <a:clrScheme name="Deccan">
       <a:dk1>
-        <a:sysClr val="windowText" lastClr="000000"/>
+        <a:srgbClr val="1C1917"/>
       </a:dk1>
       <a:lt1>
-        <a:sysClr val="window" lastClr="FFFFFF"/>
+        <a:srgbClr val="FFFFFF"/>
       </a:lt1>
       <a:dk2>
-        <a:srgbClr val="1F497D"/>
+        <a:srgbClr val="44403C"/>
       </a:dk2>
       <a:lt2>
-        <a:srgbClr val="EEECE1"/>
+        <a:srgbClr val="F5F5F4"/>
       </a:lt2>
       <a:accent1>
-        <a:srgbClr val="4F81BD"/>
+        <a:srgbClr val="164999"/>
       </a:accent1>
       <a:accent2>
-        <a:srgbClr val="C0504D"/>
+        <a:srgbClr val="2D5BA3"/>
       </a:accent2>
       <a:accent3>
-        <a:srgbClr val="9BBB59"/>
+        <a:srgbClr val="7392C2"/>
       </a:accent3>
       <a:accent4>
-        <a:srgbClr val="8064A2"/>
+        <a:srgbClr val="B9C8E0"/>
       </a:accent4>
       <a:accent5>
-        <a:srgbClr val="4BACC6"/>
+        <a:srgbClr val="DCE4F0"/>
       </a:accent5>
       <a:accent6>
-        <a:srgbClr val="F79646"/>
+        <a:srgbClr val="78716C"/>
       </a:accent6>
       <a:hlink>
-        <a:srgbClr val="0000FF"/>
+        <a:srgbClr val="164999"/>
       </a:hlink>
       <a:folHlink>
-        <a:srgbClr val="800080"/>
+        <a:srgbClr val="7392C2"/>
       </a:folHlink>
     </a:clrScheme>
-    <a:fontScheme name="Office">
+    <a:fontScheme name="Deccan">
       <a:majorFont>
-        <a:latin typeface="Calibri"/>
+        <a:latin typeface="Segoe UI Variable Display"/>
         <a:ea typeface=""/>
         <a:cs typeface=""/>
-        <a:font script="Jpan" typeface="ＭＳ Ｐゴシック"/>
-        <a:font script="Hang" typeface="맑은 고딕"/>
-        <a:font script="Hans" typeface="宋体"/>
-        <a:font script="Hant" typeface="新細明體"/>
-        <a:font script="Arab" typeface="Times New Roman"/>
-        <a:font script="Hebr" typeface="Times New Roman"/>
-        <a:font script="Thai" typeface="Angsana New"/>
-        <a:font script="Ethi" typeface="Nyala"/>
-        <a:font script="Beng" typeface="Vrinda"/>
-        <a:font script="Gujr" typeface="Shruti"/>
-        <a:font script="Khmr" typeface="MoolBoran"/>
-        <a:font script="Knda" typeface="Tunga"/>
-        <a:font script="Guru" typeface="Raavi"/>
-        <a:font script="Cans" typeface="Euphemia"/>
-        <a:font script="Cher" typeface="Plantagenet Cherokee"/>
-        <a:font script="Yiii" typeface="Microsoft Yi Baiti"/>
-        <a:font script="Tibt" typeface="Microsoft Himalaya"/>
-        <a:font script="Thaa" typeface="MV Boli"/>
-        <a:font script="Deva" typeface="Mangal"/>
-        <a:font script="Telu" typeface="Gautami"/>
-        <a:font script="Taml" typeface="Latha"/>
-        <a:font script="Syrc" typeface="Estrangelo Edessa"/>
-        <a:font script="Orya" typeface="Kalinga"/>
-        <a:font script="Mlym" typeface="Kartika"/>
-        <a:font script="Laoo" typeface="DokChampa"/>
-        <a:font script="Sinh" typeface="Iskoola Pota"/>
-        <a:font script="Mong" typeface="Mongolian Baiti"/>
-        <a:font script="Viet" typeface="Times New Roman"/>
-        <a:font script="Uigh" typeface="Microsoft Uighur"/>
-        <a:font script="Geor" typeface="Sylfaen"/>
       </a:majorFont>
       <a:minorFont>
-        <a:latin typeface="Calibri"/>
+        <a:latin typeface="Segoe UI Variable Text"/>
         <a:ea typeface=""/>
         <a:cs typeface=""/>
-        <a:font script="Jpan" typeface="ＭＳ Ｐゴシック"/>
-        <a:font script="Hang" typeface="맑은 고딕"/>
-        <a:font script="Hans" typeface="宋体"/>
-        <a:font script="Hant" typeface="新細明體"/>
-        <a:font script="Arab" typeface="Arial"/>
-        <a:font script="Hebr" typeface="Arial"/>
-        <a:font script="Thai" typeface="Cordia New"/>
-        <a:font script="Ethi" typeface="Nyala"/>
-        <a:font script="Beng" typeface="Vrinda"/>
-        <a:font script="Gujr" typeface="Shruti"/>
-        <a:font script="Khmr" typeface="DaunPenh"/>
-        <a:font script="Knda" typeface="Tunga"/>
-        <a:font script="Guru" typeface="Raavi"/>
-        <a:font script="Cans" typeface="Euphemia"/>
-        <a:font script="Cher" typeface="Plantagenet Cherokee"/>
-        <a:font script="Yiii" typeface="Microsoft Yi Baiti"/>
-        <a:font script="Tibt" typeface="Microsoft Himalaya"/>
-        <a:font script="Thaa" typeface="MV Boli"/>
-        <a:font script="Deva" typeface="Mangal"/>
-        <a:font script="Telu" typeface="Gautami"/>
-        <a:font script="Taml" typeface="Latha"/>
-        <a:font script="Syrc" typeface="Estrangelo Edessa"/>
-        <a:font script="Orya" typeface="Kalinga"/>
-        <a:font script="Mlym" typeface="Kartika"/>
-        <a:font script="Laoo" typeface="DokChampa"/>
-        <a:font script="Sinh" typeface="Iskoola Pota"/>
-        <a:font script="Mong" typeface="Mongolian Baiti"/>
-        <a:font script="Viet" typeface="Arial"/>
-        <a:font script="Uigh" typeface="Microsoft Uighur"/>
-        <a:font script="Geor" typeface="Sylfaen"/>
       </a:minorFont>
     </a:fontScheme>
     <a:fmtScheme name="Office">
